--- a/docs/quickguides/en/cars/pptx/T15-14_Quick_Guide_oneSCM_Zentrale_Grundlagen_an_die_Marktpflege_uebergeben_EN_Cars.pptx
+++ b/docs/quickguides/en/cars/pptx/T15-14_Quick_Guide_oneSCM_Zentrale_Grundlagen_an_die_Marktpflege_uebergeben_EN_Cars.pptx
@@ -1547,7 +1547,7 @@
                 <a:ea typeface="MB Corpo S Text Office" pitchFamily="34" charset="-122"/>
                 <a:cs typeface="MB Corpo S Text Office" pitchFamily="34" charset="-120"/>
               </a:rPr>
-              <a:t>This document is interactive – references to handbook chapters and systems are provided as links.</a:t>
+              <a:t>References to handbook chapters and systems are highlighted; e-mail addresses are provided as links.</a:t>
             </a:r>
             <a:endParaRPr lang="en-US" sz="900" dirty="0"/>
           </a:p>
